--- a/slides/designagent-codewalk.pptx
+++ b/slides/designagent-codewalk.pptx
@@ -13412,12 +13412,12 @@
           <a:p>
             <a:pPr indent="0" marL="0">
               <a:lnSpc>
-                <a:spcPts val="1300"/>
+                <a:spcPts val="1017"/>
               </a:lnSpc>
               <a:buNone/>
             </a:pPr>
             <a:r>
-              <a:rPr lang="en-US" sz="1040" dirty="0">
+              <a:rPr lang="en-US" sz="814" dirty="0">
                 <a:solidFill>
                   <a:srgbClr val="DCE5EC"/>
                 </a:solidFill>
@@ -13425,19 +13425,19 @@
                 <a:ea typeface="Consolas" pitchFamily="34" charset="-122"/>
                 <a:cs typeface="Consolas" pitchFamily="34" charset="-120"/>
               </a:rPr>
-              <a:t>$ uv sync --extra dev                        # --extra chem for ChemGraph</a:t>
-            </a:r>
-            <a:endParaRPr lang="en-US" sz="1040" dirty="0"/>
+              <a:t>$ uv pip install -e refcodes/radical.asyncflow -e refcodes/rhapsody</a:t>
+            </a:r>
+            <a:endParaRPr lang="en-US" sz="814" dirty="0"/>
           </a:p>
           <a:p>
             <a:pPr indent="0" marL="0">
               <a:lnSpc>
-                <a:spcPts val="1300"/>
+                <a:spcPts val="1017"/>
               </a:lnSpc>
               <a:buNone/>
             </a:pPr>
             <a:r>
-              <a:rPr lang="en-US" sz="1040" dirty="0">
+              <a:rPr lang="en-US" sz="814" dirty="0">
                 <a:solidFill>
                   <a:srgbClr val="DCE5EC"/>
                 </a:solidFill>
@@ -13445,19 +13445,19 @@
                 <a:ea typeface="Consolas" pitchFamily="34" charset="-122"/>
                 <a:cs typeface="Consolas" pitchFamily="34" charset="-120"/>
               </a:rPr>
-              <a:t>$ python -m designagent --reload             # :8000</a:t>
-            </a:r>
-            <a:endParaRPr lang="en-US" sz="1040" dirty="0"/>
+              <a:t>$ uv pip install --no-deps -e refcodes/flowgentic   # its pins conflict</a:t>
+            </a:r>
+            <a:endParaRPr lang="en-US" sz="814" dirty="0"/>
           </a:p>
           <a:p>
             <a:pPr indent="0" marL="0">
               <a:lnSpc>
-                <a:spcPts val="1300"/>
+                <a:spcPts val="1017"/>
               </a:lnSpc>
               <a:buNone/>
             </a:pPr>
             <a:r>
-              <a:rPr lang="en-US" sz="1040" dirty="0">
+              <a:rPr lang="en-US" sz="814" dirty="0">
                 <a:solidFill>
                   <a:srgbClr val="DCE5EC"/>
                 </a:solidFill>
@@ -13465,28 +13465,19 @@
                 <a:ea typeface="Consolas" pitchFamily="34" charset="-122"/>
                 <a:cs typeface="Consolas" pitchFamily="34" charset="-120"/>
               </a:rPr>
-              <a:t>$ cd frontend &amp;&amp; npm install &amp;&amp; npm run dev  # :5173, proxies /api</a:t>
-            </a:r>
-            <a:endParaRPr lang="en-US" sz="1040" dirty="0"/>
+              <a:t>$ uv pip install -e ".[dev]"                        # ".[chem]" adds ChemGraph</a:t>
+            </a:r>
+            <a:endParaRPr lang="en-US" sz="814" dirty="0"/>
           </a:p>
           <a:p>
             <a:pPr indent="0" marL="0">
               <a:lnSpc>
-                <a:spcPts val="1300"/>
+                <a:spcPts val="1017"/>
               </a:lnSpc>
               <a:buNone/>
             </a:pPr>
-            <a:endParaRPr lang="en-US" sz="1040" dirty="0"/>
-          </a:p>
-          <a:p>
-            <a:pPr indent="0" marL="0">
-              <a:lnSpc>
-                <a:spcPts val="1300"/>
-              </a:lnSpc>
-              <a:buNone/>
-            </a:pPr>
-            <a:r>
-              <a:rPr lang="en-US" sz="1040" dirty="0">
+            <a:r>
+              <a:rPr lang="en-US" sz="814" dirty="0">
                 <a:solidFill>
                   <a:srgbClr val="DCE5EC"/>
                 </a:solidFill>
@@ -13494,19 +13485,19 @@
                 <a:ea typeface="Consolas" pitchFamily="34" charset="-122"/>
                 <a:cs typeface="Consolas" pitchFamily="34" charset="-120"/>
               </a:rPr>
-              <a:t>$ pytest -q -m "not live"                    # 83 tests, no network</a:t>
-            </a:r>
-            <a:endParaRPr lang="en-US" sz="1040" dirty="0"/>
+              <a:t>$ python -m designagent --reload                    # :8000</a:t>
+            </a:r>
+            <a:endParaRPr lang="en-US" sz="814" dirty="0"/>
           </a:p>
           <a:p>
             <a:pPr indent="0" marL="0">
               <a:lnSpc>
-                <a:spcPts val="1300"/>
+                <a:spcPts val="1017"/>
               </a:lnSpc>
               <a:buNone/>
             </a:pPr>
             <a:r>
-              <a:rPr lang="en-US" sz="1040" dirty="0">
+              <a:rPr lang="en-US" sz="814" dirty="0">
                 <a:solidFill>
                   <a:srgbClr val="DCE5EC"/>
                 </a:solidFill>
@@ -13514,45 +13505,94 @@
                 <a:ea typeface="Consolas" pitchFamily="34" charset="-122"/>
                 <a:cs typeface="Consolas" pitchFamily="34" charset="-120"/>
               </a:rPr>
-              <a:t>$ pytest -q tests/test_orbit_local.py        # 6 tests, real local broker</a:t>
-            </a:r>
-            <a:endParaRPr lang="en-US" sz="1040" dirty="0"/>
-          </a:p>
-        </p:txBody>
-      </p:sp>
-      <p:sp>
-        <p:nvSpPr>
-          <p:cNvPr id="6" name="Text 4"/>
-          <p:cNvSpPr txBox="1"/>
-          <p:nvPr/>
-        </p:nvSpPr>
-        <p:spPr>
-          <a:xfrm>
-            <a:off x="457200" y="2679192"/>
-            <a:ext cx="6675120" cy="201168"/>
-          </a:xfrm>
-          <a:prstGeom prst="rect">
-            <a:avLst/>
-          </a:prstGeom>
-          <a:noFill/>
-          <a:ln/>
-        </p:spPr>
-        <p:txBody>
-          <a:bodyPr wrap="square" lIns="0" tIns="0" rIns="0" bIns="0" rtlCol="0" anchor="t"/>
-          <a:lstStyle/>
-          <a:p>
-            <a:pPr algn="r" indent="0" marL="0">
-              <a:buNone/>
-            </a:pPr>
-            <a:r>
-              <a:rPr lang="en-US" sz="850" dirty="0">
-                <a:solidFill>
-                  <a:srgbClr val="5E6B75"/>
+              <a:t>$ cd frontend &amp;&amp; npm install &amp;&amp; npm run dev         # :5173, proxies /api</a:t>
+            </a:r>
+            <a:endParaRPr lang="en-US" sz="814" dirty="0"/>
+          </a:p>
+          <a:p>
+            <a:pPr indent="0" marL="0">
+              <a:lnSpc>
+                <a:spcPts val="1017"/>
+              </a:lnSpc>
+              <a:buNone/>
+            </a:pPr>
+            <a:endParaRPr lang="en-US" sz="814" dirty="0"/>
+          </a:p>
+          <a:p>
+            <a:pPr indent="0" marL="0">
+              <a:lnSpc>
+                <a:spcPts val="1017"/>
+              </a:lnSpc>
+              <a:buNone/>
+            </a:pPr>
+            <a:r>
+              <a:rPr lang="en-US" sz="814" dirty="0">
+                <a:solidFill>
+                  <a:srgbClr val="DCE5EC"/>
                 </a:solidFill>
                 <a:latin typeface="Consolas" pitchFamily="34" charset="0"/>
                 <a:ea typeface="Consolas" pitchFamily="34" charset="-122"/>
                 <a:cs typeface="Consolas" pitchFamily="34" charset="-120"/>
               </a:rPr>
+              <a:t>$ pytest -q -m "not live"                           # 83 tests, no network</a:t>
+            </a:r>
+            <a:endParaRPr lang="en-US" sz="814" dirty="0"/>
+          </a:p>
+          <a:p>
+            <a:pPr indent="0" marL="0">
+              <a:lnSpc>
+                <a:spcPts val="1017"/>
+              </a:lnSpc>
+              <a:buNone/>
+            </a:pPr>
+            <a:r>
+              <a:rPr lang="en-US" sz="814" dirty="0">
+                <a:solidFill>
+                  <a:srgbClr val="DCE5EC"/>
+                </a:solidFill>
+                <a:latin typeface="Consolas" pitchFamily="34" charset="0"/>
+                <a:ea typeface="Consolas" pitchFamily="34" charset="-122"/>
+                <a:cs typeface="Consolas" pitchFamily="34" charset="-120"/>
+              </a:rPr>
+              <a:t>$ pytest -q tests/test_orbit_local.py               # 6 tests, real local broker</a:t>
+            </a:r>
+            <a:endParaRPr lang="en-US" sz="814" dirty="0"/>
+          </a:p>
+        </p:txBody>
+      </p:sp>
+      <p:sp>
+        <p:nvSpPr>
+          <p:cNvPr id="6" name="Text 4"/>
+          <p:cNvSpPr txBox="1"/>
+          <p:nvPr/>
+        </p:nvSpPr>
+        <p:spPr>
+          <a:xfrm>
+            <a:off x="457200" y="2679192"/>
+            <a:ext cx="6675120" cy="201168"/>
+          </a:xfrm>
+          <a:prstGeom prst="rect">
+            <a:avLst/>
+          </a:prstGeom>
+          <a:noFill/>
+          <a:ln/>
+        </p:spPr>
+        <p:txBody>
+          <a:bodyPr wrap="square" lIns="0" tIns="0" rIns="0" bIns="0" rtlCol="0" anchor="t"/>
+          <a:lstStyle/>
+          <a:p>
+            <a:pPr algn="r" indent="0" marL="0">
+              <a:buNone/>
+            </a:pPr>
+            <a:r>
+              <a:rPr lang="en-US" sz="850" dirty="0">
+                <a:solidFill>
+                  <a:srgbClr val="5E6B75"/>
+                </a:solidFill>
+                <a:latin typeface="Consolas" pitchFamily="34" charset="0"/>
+                <a:ea typeface="Consolas" pitchFamily="34" charset="-122"/>
+                <a:cs typeface="Consolas" pitchFamily="34" charset="-120"/>
+              </a:rPr>
               <a:t>VERBATIM</a:t>
             </a:r>
             <a:endParaRPr lang="en-US" sz="850" dirty="0"/>
@@ -13568,7 +13608,7 @@
         <p:spPr>
           <a:xfrm>
             <a:off x="7406640" y="1417320"/>
-            <a:ext cx="4782312" cy="1234440"/>
+            <a:ext cx="4782312" cy="1463040"/>
           </a:xfrm>
           <a:prstGeom prst="rect">
             <a:avLst/>
@@ -13617,7 +13657,7 @@
                 <a:ea typeface="Calibri" pitchFamily="34" charset="-122"/>
                 <a:cs typeface="Calibri" pitchFamily="34" charset="-120"/>
               </a:rPr>
-              <a:t>No key required</a:t>
+              <a:t>Two things to know</a:t>
             </a:r>
             <a:endParaRPr lang="en-US" sz="1300" dirty="0"/>
           </a:p>
@@ -13632,7 +13672,7 @@
         <p:spPr>
           <a:xfrm>
             <a:off x="7543800" y="1828800"/>
-            <a:ext cx="4507992" cy="731520"/>
+            <a:ext cx="4507992" cy="960120"/>
           </a:xfrm>
           <a:prstGeom prst="rect">
             <a:avLst/>
@@ -13652,7 +13692,7 @@
               <a:buChar char="•"/>
             </a:pPr>
             <a:r>
-              <a:rPr lang="en-US" sz="1100" dirty="0">
+              <a:rPr lang="en-US" sz="1050" dirty="0">
                 <a:solidFill>
                   <a:srgbClr val="22303C"/>
                 </a:solidFill>
@@ -13660,9 +13700,30 @@
                 <a:ea typeface="Calibri" pitchFamily="34" charset="-122"/>
                 <a:cs typeface="Calibri" pitchFamily="34" charset="-120"/>
               </a:rPr>
-              <a:t>There is no configuration step that must succeed. Every layer notes what it could not do on /api/health and keeps going.</a:t>
-            </a:r>
-            <a:endParaRPr lang="en-US" sz="1100" dirty="0"/>
+              <a:t>No key is required: every layer notes what it could not do on /api/health and keeps going.</a:t>
+            </a:r>
+            <a:endParaRPr lang="en-US" sz="1050" dirty="0"/>
+          </a:p>
+          <a:p>
+            <a:pPr marL="342900" indent="-342900">
+              <a:spcAft>
+                <a:spcPts val="400"/>
+              </a:spcAft>
+              <a:buSzPct val="100000"/>
+              <a:buChar char="•"/>
+            </a:pPr>
+            <a:r>
+              <a:rPr lang="en-US" sz="1050" dirty="0">
+                <a:solidFill>
+                  <a:srgbClr val="22303C"/>
+                </a:solidFill>
+                <a:latin typeface="Calibri" pitchFamily="34" charset="0"/>
+                <a:ea typeface="Calibri" pitchFamily="34" charset="-122"/>
+                <a:cs typeface="Calibri" pitchFamily="34" charset="-120"/>
+              </a:rPr>
+              <a:t>The three middleware packages are local editable installs from refcodes/, which is gitignored — uv sync alone will not get you a working tree.</a:t>
+            </a:r>
+            <a:endParaRPr lang="en-US" sz="1050" dirty="0"/>
           </a:p>
         </p:txBody>
       </p:sp>

--- a/slides/designagent-codewalk.pptx
+++ b/slides/designagent-codewalk.pptx
@@ -1073,7 +1073,7 @@
 The chat endpoint is a POST that returns an event stream — not EventSource, because the prompt goes in the body. Seven frame kinds. The thing I would point at is that a single asyncio queue merges LangGraph's own stream with TaskManager events, so node status and task progress arrive in one ordered stream rather than two the client has to interleave.
 The client code is there because of a bug class people hit constantly: a network chunk boundary lands in the middle of an SSE frame, so you hold partial frames in a buffer until you see a blank line. And a malformed frame is skipped rather than killing the stream.
 The viewer: rcsb-molstar from the CDN, loader cached on window so one fetch serves every mount, one viewer per mount, resize observed. Two things bit me — createComponent takes no colour, so colours have to go through a plugin call to update the representation theme; and the analyst inlines coordinates as a JSON artifact so the viewer does not need a second authenticated fetch.
-Last line is the honest one. I had no browser in the session where I built this. I verified the dev server, the proxy, a real artifact fetched through it, and that the Mol* assets return 200 with CORS. Whether the canvas draws is the one thing I am asking someone to eyeball.</a:t>
+Last line: this was built without a browser available, so for a while the canvas was the one thing nobody had actually looked at — everything around it checked out, which is exactly the situation where you convince yourself it is fine. It was confirmed rendering on the first of October. I am mentioning it because it was on the status slide as an open item until then, and some of you may have seen that version.</a:t>
             </a:r>
             <a:endParaRPr lang="en-US" dirty="0"/>
           </a:p>
@@ -1254,7 +1254,7 @@
               <a:rPr lang="en-US" dirty="0"/>
               <a:t>[1:20] Two columns. Left is what runs end to end against something real, right is what is built and has never run for real.
 Left, briefly: the loop, two rounds, routed by the improvement test. The query interface against live RCSB, UniProt and Europe PMC. Twelve real folds on the rhapsody pool, six at a time, reaped out of order. All three lake tiers with the counts you saw. Four artifacts on disk. Streaming working.
-Right is the column that matters. ProteinMPNN is a job spec and a FASTA parser; with no endpoint, the orchestrator falls back to a heuristic proposer, and the output says so in a note field rather than quietly implying ProteinMPNN ran. The Globus adapter has never met a live endpoint. ORBIT works, against localhost only — which proves the client path and proves nothing about a queue. ChemGraph has been exercised by tests and never by a campaign. The Mol* canvas has not been looked at by a human.
+Right is the column that matters. ProteinMPNN is a job spec and a FASTA parser; with no endpoint, the orchestrator falls back to a heuristic proposer, and the output says so in a note field rather than quietly implying ProteinMPNN ran. The Globus adapter has never met a live endpoint. ORBIT works, against localhost only — which proves the client path and proves nothing about a queue. ChemGraph has been exercised by tests and never by a campaign.
 And the bottom line is the one I would put on a slide even if nobody asked: no HPC endpoint has ever run a task for this agent. Everything I have said about the remote path is a statement about the client, not about HPC.</a:t>
             </a:r>
             <a:endParaRPr lang="en-US" dirty="0"/>
@@ -13228,13 +13228,13 @@
             <a:r>
               <a:rPr lang="en-US" sz="1250" b="1" dirty="0">
                 <a:solidFill>
-                  <a:srgbClr val="C0392B"/>
-                </a:solidFill>
-                <a:latin typeface="Calibri" pitchFamily="34" charset="0"/>
-                <a:ea typeface="Calibri" pitchFamily="34" charset="-122"/>
-                <a:cs typeface="Calibri" pitchFamily="34" charset="-120"/>
-              </a:rPr>
-              <a:t>Not verified: </a:t>
+                  <a:srgbClr val="2E7D4F"/>
+                </a:solidFill>
+                <a:latin typeface="Calibri" pitchFamily="34" charset="0"/>
+                <a:ea typeface="Calibri" pitchFamily="34" charset="-122"/>
+                <a:cs typeface="Calibri" pitchFamily="34" charset="-120"/>
+              </a:rPr>
+              <a:t>Confirmed rendering </a:t>
             </a:r>
             <a:pPr indent="0" marL="0">
               <a:buNone/>
@@ -13248,7 +13248,7 @@
                 <a:ea typeface="Calibri" pitchFamily="34" charset="-122"/>
                 <a:cs typeface="Calibri" pitchFamily="34" charset="-120"/>
               </a:rPr>
-              <a:t>no browser was available while building this. The dev server, the proxy, a real artifact fetched through it, and the Mol* CDN assets all check out; the canvas itself is unconfirmed.</a:t>
+              <a:t>in a browser on 2026-10-01. It was built without one — the dev server, the proxy, a real artifact through it and the CDN assets were all that could be checked at the time.</a:t>
             </a:r>
             <a:endParaRPr lang="en-US" sz="1250" dirty="0"/>
           </a:p>
@@ -13412,12 +13412,12 @@
           <a:p>
             <a:pPr indent="0" marL="0">
               <a:lnSpc>
-                <a:spcPts val="1017"/>
+                <a:spcPts val="1162"/>
               </a:lnSpc>
               <a:buNone/>
             </a:pPr>
             <a:r>
-              <a:rPr lang="en-US" sz="814" dirty="0">
+              <a:rPr lang="en-US" sz="930" dirty="0">
                 <a:solidFill>
                   <a:srgbClr val="DCE5EC"/>
                 </a:solidFill>
@@ -13425,19 +13425,19 @@
                 <a:ea typeface="Consolas" pitchFamily="34" charset="-122"/>
                 <a:cs typeface="Consolas" pitchFamily="34" charset="-120"/>
               </a:rPr>
-              <a:t>$ uv pip install -e refcodes/radical.asyncflow -e refcodes/rhapsody</a:t>
-            </a:r>
-            <a:endParaRPr lang="en-US" sz="814" dirty="0"/>
+              <a:t>$ ./scripts/setup.sh                        # builds .venv, then verifies it</a:t>
+            </a:r>
+            <a:endParaRPr lang="en-US" sz="930" dirty="0"/>
           </a:p>
           <a:p>
             <a:pPr indent="0" marL="0">
               <a:lnSpc>
-                <a:spcPts val="1017"/>
+                <a:spcPts val="1162"/>
               </a:lnSpc>
               <a:buNone/>
             </a:pPr>
             <a:r>
-              <a:rPr lang="en-US" sz="814" dirty="0">
+              <a:rPr lang="en-US" sz="930" dirty="0">
                 <a:solidFill>
                   <a:srgbClr val="DCE5EC"/>
                 </a:solidFill>
@@ -13445,19 +13445,19 @@
                 <a:ea typeface="Consolas" pitchFamily="34" charset="-122"/>
                 <a:cs typeface="Consolas" pitchFamily="34" charset="-120"/>
               </a:rPr>
-              <a:t>$ uv pip install --no-deps -e refcodes/flowgentic   # its pins conflict</a:t>
-            </a:r>
-            <a:endParaRPr lang="en-US" sz="814" dirty="0"/>
+              <a:t>$ ./scripts/setup.sh --check                # verify only, install nothing</a:t>
+            </a:r>
+            <a:endParaRPr lang="en-US" sz="930" dirty="0"/>
           </a:p>
           <a:p>
             <a:pPr indent="0" marL="0">
               <a:lnSpc>
-                <a:spcPts val="1017"/>
+                <a:spcPts val="1162"/>
               </a:lnSpc>
               <a:buNone/>
             </a:pPr>
             <a:r>
-              <a:rPr lang="en-US" sz="814" dirty="0">
+              <a:rPr lang="en-US" sz="930" dirty="0">
                 <a:solidFill>
                   <a:srgbClr val="DCE5EC"/>
                 </a:solidFill>
@@ -13465,19 +13465,19 @@
                 <a:ea typeface="Consolas" pitchFamily="34" charset="-122"/>
                 <a:cs typeface="Consolas" pitchFamily="34" charset="-120"/>
               </a:rPr>
-              <a:t>$ uv pip install -e ".[dev]"                        # ".[chem]" adds ChemGraph</a:t>
-            </a:r>
-            <a:endParaRPr lang="en-US" sz="814" dirty="0"/>
+              <a:t>$ python -m designagent --reload            # :8000</a:t>
+            </a:r>
+            <a:endParaRPr lang="en-US" sz="930" dirty="0"/>
           </a:p>
           <a:p>
             <a:pPr indent="0" marL="0">
               <a:lnSpc>
-                <a:spcPts val="1017"/>
+                <a:spcPts val="1162"/>
               </a:lnSpc>
               <a:buNone/>
             </a:pPr>
             <a:r>
-              <a:rPr lang="en-US" sz="814" dirty="0">
+              <a:rPr lang="en-US" sz="930" dirty="0">
                 <a:solidFill>
                   <a:srgbClr val="DCE5EC"/>
                 </a:solidFill>
@@ -13485,19 +13485,28 @@
                 <a:ea typeface="Consolas" pitchFamily="34" charset="-122"/>
                 <a:cs typeface="Consolas" pitchFamily="34" charset="-120"/>
               </a:rPr>
-              <a:t>$ python -m designagent --reload                    # :8000</a:t>
-            </a:r>
-            <a:endParaRPr lang="en-US" sz="814" dirty="0"/>
+              <a:t>$ cd frontend &amp;&amp; npm install &amp;&amp; npm run dev # :5173, proxies /api</a:t>
+            </a:r>
+            <a:endParaRPr lang="en-US" sz="930" dirty="0"/>
           </a:p>
           <a:p>
             <a:pPr indent="0" marL="0">
               <a:lnSpc>
-                <a:spcPts val="1017"/>
+                <a:spcPts val="1162"/>
               </a:lnSpc>
               <a:buNone/>
             </a:pPr>
-            <a:r>
-              <a:rPr lang="en-US" sz="814" dirty="0">
+            <a:endParaRPr lang="en-US" sz="930" dirty="0"/>
+          </a:p>
+          <a:p>
+            <a:pPr indent="0" marL="0">
+              <a:lnSpc>
+                <a:spcPts val="1162"/>
+              </a:lnSpc>
+              <a:buNone/>
+            </a:pPr>
+            <a:r>
+              <a:rPr lang="en-US" sz="930" dirty="0">
                 <a:solidFill>
                   <a:srgbClr val="DCE5EC"/>
                 </a:solidFill>
@@ -13505,28 +13514,19 @@
                 <a:ea typeface="Consolas" pitchFamily="34" charset="-122"/>
                 <a:cs typeface="Consolas" pitchFamily="34" charset="-120"/>
               </a:rPr>
-              <a:t>$ cd frontend &amp;&amp; npm install &amp;&amp; npm run dev         # :5173, proxies /api</a:t>
-            </a:r>
-            <a:endParaRPr lang="en-US" sz="814" dirty="0"/>
+              <a:t>$ pytest -q                                 # 83 tests, no network</a:t>
+            </a:r>
+            <a:endParaRPr lang="en-US" sz="930" dirty="0"/>
           </a:p>
           <a:p>
             <a:pPr indent="0" marL="0">
               <a:lnSpc>
-                <a:spcPts val="1017"/>
+                <a:spcPts val="1162"/>
               </a:lnSpc>
               <a:buNone/>
             </a:pPr>
-            <a:endParaRPr lang="en-US" sz="814" dirty="0"/>
-          </a:p>
-          <a:p>
-            <a:pPr indent="0" marL="0">
-              <a:lnSpc>
-                <a:spcPts val="1017"/>
-              </a:lnSpc>
-              <a:buNone/>
-            </a:pPr>
-            <a:r>
-              <a:rPr lang="en-US" sz="814" dirty="0">
+            <a:r>
+              <a:rPr lang="en-US" sz="930" dirty="0">
                 <a:solidFill>
                   <a:srgbClr val="DCE5EC"/>
                 </a:solidFill>
@@ -13534,29 +13534,9 @@
                 <a:ea typeface="Consolas" pitchFamily="34" charset="-122"/>
                 <a:cs typeface="Consolas" pitchFamily="34" charset="-120"/>
               </a:rPr>
-              <a:t>$ pytest -q -m "not live"                           # 83 tests, no network</a:t>
-            </a:r>
-            <a:endParaRPr lang="en-US" sz="814" dirty="0"/>
-          </a:p>
-          <a:p>
-            <a:pPr indent="0" marL="0">
-              <a:lnSpc>
-                <a:spcPts val="1017"/>
-              </a:lnSpc>
-              <a:buNone/>
-            </a:pPr>
-            <a:r>
-              <a:rPr lang="en-US" sz="814" dirty="0">
-                <a:solidFill>
-                  <a:srgbClr val="DCE5EC"/>
-                </a:solidFill>
-                <a:latin typeface="Consolas" pitchFamily="34" charset="0"/>
-                <a:ea typeface="Consolas" pitchFamily="34" charset="-122"/>
-                <a:cs typeface="Consolas" pitchFamily="34" charset="-120"/>
-              </a:rPr>
-              <a:t>$ pytest -q tests/test_orbit_local.py               # 6 tests, real local broker</a:t>
-            </a:r>
-            <a:endParaRPr lang="en-US" sz="814" dirty="0"/>
+              <a:t>$ pytest -q -m live                         # 6 tests, starts a real broker</a:t>
+            </a:r>
+            <a:endParaRPr lang="en-US" sz="930" dirty="0"/>
           </a:p>
         </p:txBody>
       </p:sp>
@@ -13721,7 +13701,7 @@
                 <a:ea typeface="Calibri" pitchFamily="34" charset="-122"/>
                 <a:cs typeface="Calibri" pitchFamily="34" charset="-120"/>
               </a:rPr>
-              <a:t>The three middleware packages are local editable installs from refcodes/, which is gitignored — uv sync alone will not get you a working tree.</a:t>
+              <a:t>uv sync cannot work here: the three middleware packages are local editable installs from refcodes/, and flowgentic pins two of its own deps to git URLs. setup.sh encodes that, and --check fails loudly instead of letting an import die.</a:t>
             </a:r>
             <a:endParaRPr lang="en-US" sz="1050" dirty="0"/>
           </a:p>
@@ -14802,7 +14782,7 @@
                           <a:ea typeface="Consolas" pitchFamily="34" charset="-122"/>
                           <a:cs typeface="Consolas" pitchFamily="34" charset="-120"/>
                         </a:rPr>
-                        <a:t>tests/test_orbit_local.py</a:t>
+                        <a:t>pytest -m live</a:t>
                       </a:r>
                       <a:endParaRPr lang="en-US" sz="1050" dirty="0">
                         <a:latin typeface="Consolas" charset="0"/>
@@ -15041,7 +15021,7 @@
                 <a:ea typeface="Calibri" pitchFamily="34" charset="-122"/>
                 <a:cs typeface="Calibri" pitchFamily="34" charset="-120"/>
               </a:rPr>
-              <a:t>83 tests need no network, no pool and no endpoint, because nodes only reach through Deps. The 6 that do need a substrate are marked </a:t>
+              <a:t>83 tests need no network, no pool and no endpoint, because nodes only reach through Deps. The 6 that do are marked </a:t>
             </a:r>
             <a:pPr indent="0" marL="0">
               <a:buNone/>
@@ -15069,7 +15049,7 @@
                 <a:ea typeface="Calibri" pitchFamily="34" charset="-122"/>
                 <a:cs typeface="Calibri" pitchFamily="34" charset="-120"/>
               </a:rPr>
-              <a:t> and start their own broker.</a:t>
+              <a:t>, deselected by default, and start their own broker.</a:t>
             </a:r>
             <a:endParaRPr lang="en-US" sz="1300" dirty="0"/>
           </a:p>
@@ -15258,7 +15238,7 @@
         <p:spPr>
           <a:xfrm>
             <a:off x="457200" y="1810512"/>
-            <a:ext cx="5715000" cy="566928"/>
+            <a:ext cx="5715000" cy="502920"/>
           </a:xfrm>
           <a:prstGeom prst="rect">
             <a:avLst/>
@@ -15282,8 +15262,8 @@
         </p:nvSpPr>
         <p:spPr>
           <a:xfrm>
-            <a:off x="566928" y="1847088"/>
-            <a:ext cx="5486400" cy="237744"/>
+            <a:off x="566928" y="1828800"/>
+            <a:ext cx="5486400" cy="228600"/>
           </a:xfrm>
           <a:prstGeom prst="rect">
             <a:avLst/>
@@ -15299,7 +15279,7 @@
               <a:buNone/>
             </a:pPr>
             <a:r>
-              <a:rPr lang="en-US" sz="1150" b="1" dirty="0">
+              <a:rPr lang="en-US" sz="1100" b="1" dirty="0">
                 <a:solidFill>
                   <a:srgbClr val="16222B"/>
                 </a:solidFill>
@@ -15309,7 +15289,7 @@
               </a:rPr>
               <a:t>The LangGraph loop, all five nodes</a:t>
             </a:r>
-            <a:endParaRPr lang="en-US" sz="1150" dirty="0"/>
+            <a:endParaRPr lang="en-US" sz="1100" dirty="0"/>
           </a:p>
         </p:txBody>
       </p:sp>
@@ -15321,8 +15301,8 @@
         </p:nvSpPr>
         <p:spPr>
           <a:xfrm>
-            <a:off x="566928" y="2084832"/>
-            <a:ext cx="5486400" cy="256032"/>
+            <a:off x="566928" y="2048256"/>
+            <a:ext cx="5486400" cy="246888"/>
           </a:xfrm>
           <a:prstGeom prst="rect">
             <a:avLst/>
@@ -15338,7 +15318,7 @@
               <a:buNone/>
             </a:pPr>
             <a:r>
-              <a:rPr lang="en-US" sz="1050" dirty="0">
+              <a:rPr lang="en-US" sz="1000" dirty="0">
                 <a:solidFill>
                   <a:srgbClr val="5E6B75"/>
                 </a:solidFill>
@@ -15348,7 +15328,7 @@
               </a:rPr>
               <a:t>two rounds, routed by the improvement test, on a real target</a:t>
             </a:r>
-            <a:endParaRPr lang="en-US" sz="1050" dirty="0"/>
+            <a:endParaRPr lang="en-US" sz="1000" dirty="0"/>
           </a:p>
         </p:txBody>
       </p:sp>
@@ -15360,8 +15340,8 @@
         </p:nvSpPr>
         <p:spPr>
           <a:xfrm>
-            <a:off x="457200" y="2432304"/>
-            <a:ext cx="5715000" cy="566928"/>
+            <a:off x="457200" y="2359152"/>
+            <a:ext cx="5715000" cy="502920"/>
           </a:xfrm>
           <a:prstGeom prst="rect">
             <a:avLst/>
@@ -15385,8 +15365,8 @@
         </p:nvSpPr>
         <p:spPr>
           <a:xfrm>
-            <a:off x="566928" y="2468880"/>
-            <a:ext cx="5486400" cy="237744"/>
+            <a:off x="566928" y="2377440"/>
+            <a:ext cx="5486400" cy="228600"/>
           </a:xfrm>
           <a:prstGeom prst="rect">
             <a:avLst/>
@@ -15402,7 +15382,7 @@
               <a:buNone/>
             </a:pPr>
             <a:r>
-              <a:rPr lang="en-US" sz="1150" b="1" dirty="0">
+              <a:rPr lang="en-US" sz="1100" b="1" dirty="0">
                 <a:solidFill>
                   <a:srgbClr val="16222B"/>
                 </a:solidFill>
@@ -15412,7 +15392,7 @@
               </a:rPr>
               <a:t>Query interface</a:t>
             </a:r>
-            <a:endParaRPr lang="en-US" sz="1150" dirty="0"/>
+            <a:endParaRPr lang="en-US" sz="1100" dirty="0"/>
           </a:p>
         </p:txBody>
       </p:sp>
@@ -15424,8 +15404,8 @@
         </p:nvSpPr>
         <p:spPr>
           <a:xfrm>
-            <a:off x="566928" y="2706624"/>
-            <a:ext cx="5486400" cy="256032"/>
+            <a:off x="566928" y="2596896"/>
+            <a:ext cx="5486400" cy="246888"/>
           </a:xfrm>
           <a:prstGeom prst="rect">
             <a:avLst/>
@@ -15441,7 +15421,7 @@
               <a:buNone/>
             </a:pPr>
             <a:r>
-              <a:rPr lang="en-US" sz="1050" dirty="0">
+              <a:rPr lang="en-US" sz="1000" dirty="0">
                 <a:solidFill>
                   <a:srgbClr val="5E6B75"/>
                 </a:solidFill>
@@ -15451,7 +15431,7 @@
               </a:rPr>
               <a:t>RCSB, UniProt, Europe PMC — live, with cross-referencing both directions</a:t>
             </a:r>
-            <a:endParaRPr lang="en-US" sz="1050" dirty="0"/>
+            <a:endParaRPr lang="en-US" sz="1000" dirty="0"/>
           </a:p>
         </p:txBody>
       </p:sp>
@@ -15463,8 +15443,8 @@
         </p:nvSpPr>
         <p:spPr>
           <a:xfrm>
-            <a:off x="457200" y="3054096"/>
-            <a:ext cx="5715000" cy="566928"/>
+            <a:off x="457200" y="2907792"/>
+            <a:ext cx="5715000" cy="502920"/>
           </a:xfrm>
           <a:prstGeom prst="rect">
             <a:avLst/>
@@ -15488,8 +15468,8 @@
         </p:nvSpPr>
         <p:spPr>
           <a:xfrm>
-            <a:off x="566928" y="3090672"/>
-            <a:ext cx="5486400" cy="237744"/>
+            <a:off x="566928" y="2926080"/>
+            <a:ext cx="5486400" cy="228600"/>
           </a:xfrm>
           <a:prstGeom prst="rect">
             <a:avLst/>
@@ -15505,7 +15485,7 @@
               <a:buNone/>
             </a:pPr>
             <a:r>
-              <a:rPr lang="en-US" sz="1150" b="1" dirty="0">
+              <a:rPr lang="en-US" sz="1100" b="1" dirty="0">
                 <a:solidFill>
                   <a:srgbClr val="16222B"/>
                 </a:solidFill>
@@ -15515,7 +15495,7 @@
               </a:rPr>
               <a:t>Local interface on the rhapsody pool</a:t>
             </a:r>
-            <a:endParaRPr lang="en-US" sz="1150" dirty="0"/>
+            <a:endParaRPr lang="en-US" sz="1100" dirty="0"/>
           </a:p>
         </p:txBody>
       </p:sp>
@@ -15527,8 +15507,8 @@
         </p:nvSpPr>
         <p:spPr>
           <a:xfrm>
-            <a:off x="566928" y="3328416"/>
-            <a:ext cx="5486400" cy="256032"/>
+            <a:off x="566928" y="3145536"/>
+            <a:ext cx="5486400" cy="246888"/>
           </a:xfrm>
           <a:prstGeom prst="rect">
             <a:avLst/>
@@ -15544,7 +15524,7 @@
               <a:buNone/>
             </a:pPr>
             <a:r>
-              <a:rPr lang="en-US" sz="1050" dirty="0">
+              <a:rPr lang="en-US" sz="1000" dirty="0">
                 <a:solidFill>
                   <a:srgbClr val="5E6B75"/>
                 </a:solidFill>
@@ -15554,7 +15534,7 @@
               </a:rPr>
               <a:t>12 real ESMFold predictions, 6 at a time, reaped out of order</a:t>
             </a:r>
-            <a:endParaRPr lang="en-US" sz="1050" dirty="0"/>
+            <a:endParaRPr lang="en-US" sz="1000" dirty="0"/>
           </a:p>
         </p:txBody>
       </p:sp>
@@ -15566,8 +15546,8 @@
         </p:nvSpPr>
         <p:spPr>
           <a:xfrm>
-            <a:off x="457200" y="3675888"/>
-            <a:ext cx="5715000" cy="566928"/>
+            <a:off x="457200" y="3456432"/>
+            <a:ext cx="5715000" cy="502920"/>
           </a:xfrm>
           <a:prstGeom prst="rect">
             <a:avLst/>
@@ -15591,8 +15571,8 @@
         </p:nvSpPr>
         <p:spPr>
           <a:xfrm>
-            <a:off x="566928" y="3712464"/>
-            <a:ext cx="5486400" cy="237744"/>
+            <a:off x="566928" y="3474720"/>
+            <a:ext cx="5486400" cy="228600"/>
           </a:xfrm>
           <a:prstGeom prst="rect">
             <a:avLst/>
@@ -15608,7 +15588,7 @@
               <a:buNone/>
             </a:pPr>
             <a:r>
-              <a:rPr lang="en-US" sz="1150" b="1" dirty="0">
+              <a:rPr lang="en-US" sz="1100" b="1" dirty="0">
                 <a:solidFill>
                   <a:srgbClr val="16222B"/>
                 </a:solidFill>
@@ -15618,7 +15598,7 @@
               </a:rPr>
               <a:t>All three lake tiers</a:t>
             </a:r>
-            <a:endParaRPr lang="en-US" sz="1150" dirty="0"/>
+            <a:endParaRPr lang="en-US" sz="1100" dirty="0"/>
           </a:p>
         </p:txBody>
       </p:sp>
@@ -15630,8 +15610,8 @@
         </p:nvSpPr>
         <p:spPr>
           <a:xfrm>
-            <a:off x="566928" y="3950208"/>
-            <a:ext cx="5486400" cy="256032"/>
+            <a:off x="566928" y="3694176"/>
+            <a:ext cx="5486400" cy="246888"/>
           </a:xfrm>
           <a:prstGeom prst="rect">
             <a:avLst/>
@@ -15647,7 +15627,7 @@
               <a:buNone/>
             </a:pPr>
             <a:r>
-              <a:rPr lang="en-US" sz="1050" dirty="0">
+              <a:rPr lang="en-US" sz="1000" dirty="0">
                 <a:solidFill>
                   <a:srgbClr val="5E6B75"/>
                 </a:solidFill>
@@ -15657,7 +15637,7 @@
               </a:rPr>
               <a:t>114 scores, 37 task nodes, an 11-row Parquet set</a:t>
             </a:r>
-            <a:endParaRPr lang="en-US" sz="1050" dirty="0"/>
+            <a:endParaRPr lang="en-US" sz="1000" dirty="0"/>
           </a:p>
         </p:txBody>
       </p:sp>
@@ -15669,8 +15649,8 @@
         </p:nvSpPr>
         <p:spPr>
           <a:xfrm>
-            <a:off x="457200" y="4297680"/>
-            <a:ext cx="5715000" cy="566928"/>
+            <a:off x="457200" y="4005072"/>
+            <a:ext cx="5715000" cy="502920"/>
           </a:xfrm>
           <a:prstGeom prst="rect">
             <a:avLst/>
@@ -15694,8 +15674,8 @@
         </p:nvSpPr>
         <p:spPr>
           <a:xfrm>
-            <a:off x="566928" y="4334256"/>
-            <a:ext cx="5486400" cy="237744"/>
+            <a:off x="566928" y="4023360"/>
+            <a:ext cx="5486400" cy="228600"/>
           </a:xfrm>
           <a:prstGeom prst="rect">
             <a:avLst/>
@@ -15711,7 +15691,7 @@
               <a:buNone/>
             </a:pPr>
             <a:r>
-              <a:rPr lang="en-US" sz="1150" b="1" dirty="0">
+              <a:rPr lang="en-US" sz="1100" b="1" dirty="0">
                 <a:solidFill>
                   <a:srgbClr val="16222B"/>
                 </a:solidFill>
@@ -15721,7 +15701,7 @@
               </a:rPr>
               <a:t>Artifacts</a:t>
             </a:r>
-            <a:endParaRPr lang="en-US" sz="1150" dirty="0"/>
+            <a:endParaRPr lang="en-US" sz="1100" dirty="0"/>
           </a:p>
         </p:txBody>
       </p:sp>
@@ -15733,8 +15713,8 @@
         </p:nvSpPr>
         <p:spPr>
           <a:xfrm>
-            <a:off x="566928" y="4572000"/>
-            <a:ext cx="5486400" cy="256032"/>
+            <a:off x="566928" y="4242816"/>
+            <a:ext cx="5486400" cy="246888"/>
           </a:xfrm>
           <a:prstGeom prst="rect">
             <a:avLst/>
@@ -15750,7 +15730,7 @@
               <a:buNone/>
             </a:pPr>
             <a:r>
-              <a:rPr lang="en-US" sz="1050" dirty="0">
+              <a:rPr lang="en-US" sz="1000" dirty="0">
                 <a:solidFill>
                   <a:srgbClr val="5E6B75"/>
                 </a:solidFill>
@@ -15760,7 +15740,7 @@
               </a:rPr>
               <a:t>Markdown, .docx, a sortable table, two Mol* specs — all on disk</a:t>
             </a:r>
-            <a:endParaRPr lang="en-US" sz="1050" dirty="0"/>
+            <a:endParaRPr lang="en-US" sz="1000" dirty="0"/>
           </a:p>
         </p:txBody>
       </p:sp>
@@ -15772,8 +15752,8 @@
         </p:nvSpPr>
         <p:spPr>
           <a:xfrm>
-            <a:off x="457200" y="4919472"/>
-            <a:ext cx="5715000" cy="566928"/>
+            <a:off x="457200" y="4553712"/>
+            <a:ext cx="5715000" cy="502920"/>
           </a:xfrm>
           <a:prstGeom prst="rect">
             <a:avLst/>
@@ -15797,8 +15777,8 @@
         </p:nvSpPr>
         <p:spPr>
           <a:xfrm>
-            <a:off x="566928" y="4956048"/>
-            <a:ext cx="5486400" cy="237744"/>
+            <a:off x="566928" y="4572000"/>
+            <a:ext cx="5486400" cy="228600"/>
           </a:xfrm>
           <a:prstGeom prst="rect">
             <a:avLst/>
@@ -15814,7 +15794,7 @@
               <a:buNone/>
             </a:pPr>
             <a:r>
-              <a:rPr lang="en-US" sz="1150" b="1" dirty="0">
+              <a:rPr lang="en-US" sz="1100" b="1" dirty="0">
                 <a:solidFill>
                   <a:srgbClr val="16222B"/>
                 </a:solidFill>
@@ -15824,7 +15804,7 @@
               </a:rPr>
               <a:t>Streaming</a:t>
             </a:r>
-            <a:endParaRPr lang="en-US" sz="1150" dirty="0"/>
+            <a:endParaRPr lang="en-US" sz="1100" dirty="0"/>
           </a:p>
         </p:txBody>
       </p:sp>
@@ -15836,8 +15816,8 @@
         </p:nvSpPr>
         <p:spPr>
           <a:xfrm>
-            <a:off x="566928" y="5193792"/>
-            <a:ext cx="5486400" cy="256032"/>
+            <a:off x="566928" y="4791456"/>
+            <a:ext cx="5486400" cy="246888"/>
           </a:xfrm>
           <a:prstGeom prst="rect">
             <a:avLst/>
@@ -15853,7 +15833,7 @@
               <a:buNone/>
             </a:pPr>
             <a:r>
-              <a:rPr lang="en-US" sz="1050" dirty="0">
+              <a:rPr lang="en-US" sz="1000" dirty="0">
                 <a:solidFill>
                   <a:srgbClr val="5E6B75"/>
                 </a:solidFill>
@@ -15863,13 +15843,116 @@
               </a:rPr>
               <a:t>11 status lines plus task chips over one SSE stream</a:t>
             </a:r>
-            <a:endParaRPr lang="en-US" sz="1050" dirty="0"/>
+            <a:endParaRPr lang="en-US" sz="1000" dirty="0"/>
           </a:p>
         </p:txBody>
       </p:sp>
       <p:sp>
         <p:nvSpPr>
           <p:cNvPr id="24" name="Shape 22"/>
+          <p:cNvSpPr/>
+          <p:nvPr/>
+        </p:nvSpPr>
+        <p:spPr>
+          <a:xfrm>
+            <a:off x="457200" y="5102352"/>
+            <a:ext cx="5715000" cy="502920"/>
+          </a:xfrm>
+          <a:prstGeom prst="rect">
+            <a:avLst/>
+          </a:prstGeom>
+          <a:solidFill>
+            <a:srgbClr val="EEF2F5"/>
+          </a:solidFill>
+          <a:ln w="6350">
+            <a:solidFill>
+              <a:srgbClr val="C9D1D8"/>
+            </a:solidFill>
+            <a:prstDash val="solid"/>
+          </a:ln>
+        </p:spPr>
+      </p:sp>
+      <p:sp>
+        <p:nvSpPr>
+          <p:cNvPr id="25" name="Text 23"/>
+          <p:cNvSpPr txBox="1"/>
+          <p:nvPr/>
+        </p:nvSpPr>
+        <p:spPr>
+          <a:xfrm>
+            <a:off x="566928" y="5120640"/>
+            <a:ext cx="5486400" cy="228600"/>
+          </a:xfrm>
+          <a:prstGeom prst="rect">
+            <a:avLst/>
+          </a:prstGeom>
+          <a:noFill/>
+          <a:ln/>
+        </p:spPr>
+        <p:txBody>
+          <a:bodyPr wrap="square" lIns="0" tIns="0" rIns="0" bIns="0" rtlCol="0" anchor="t"/>
+          <a:lstStyle/>
+          <a:p>
+            <a:pPr indent="0" marL="0">
+              <a:buNone/>
+            </a:pPr>
+            <a:r>
+              <a:rPr lang="en-US" sz="1100" b="1" dirty="0">
+                <a:solidFill>
+                  <a:srgbClr val="16222B"/>
+                </a:solidFill>
+                <a:latin typeface="Calibri" pitchFamily="34" charset="0"/>
+                <a:ea typeface="Calibri" pitchFamily="34" charset="-122"/>
+                <a:cs typeface="Calibri" pitchFamily="34" charset="-120"/>
+              </a:rPr>
+              <a:t>The Mol* artifact pane</a:t>
+            </a:r>
+            <a:endParaRPr lang="en-US" sz="1100" dirty="0"/>
+          </a:p>
+        </p:txBody>
+      </p:sp>
+      <p:sp>
+        <p:nvSpPr>
+          <p:cNvPr id="26" name="Text 24"/>
+          <p:cNvSpPr txBox="1"/>
+          <p:nvPr/>
+        </p:nvSpPr>
+        <p:spPr>
+          <a:xfrm>
+            <a:off x="566928" y="5340096"/>
+            <a:ext cx="5486400" cy="246888"/>
+          </a:xfrm>
+          <a:prstGeom prst="rect">
+            <a:avLst/>
+          </a:prstGeom>
+          <a:noFill/>
+          <a:ln/>
+        </p:spPr>
+        <p:txBody>
+          <a:bodyPr wrap="square" lIns="0" tIns="0" rIns="0" bIns="0" rtlCol="0" anchor="t"/>
+          <a:lstStyle/>
+          <a:p>
+            <a:pPr indent="0" marL="0">
+              <a:buNone/>
+            </a:pPr>
+            <a:r>
+              <a:rPr lang="en-US" sz="1000" dirty="0">
+                <a:solidFill>
+                  <a:srgbClr val="5E6B75"/>
+                </a:solidFill>
+                <a:latin typeface="Calibri" pitchFamily="34" charset="0"/>
+                <a:ea typeface="Calibri" pitchFamily="34" charset="-122"/>
+                <a:cs typeface="Calibri" pitchFamily="34" charset="-120"/>
+              </a:rPr>
+              <a:t>confirmed rendering in a browser, 2026-10-01</a:t>
+            </a:r>
+            <a:endParaRPr lang="en-US" sz="1000" dirty="0"/>
+          </a:p>
+        </p:txBody>
+      </p:sp>
+      <p:sp>
+        <p:nvSpPr>
+          <p:cNvPr id="27" name="Shape 25"/>
           <p:cNvSpPr/>
           <p:nvPr/>
         </p:nvSpPr>
@@ -15894,7 +15977,7 @@
       </p:sp>
       <p:sp>
         <p:nvSpPr>
-          <p:cNvPr id="25" name="Text 23"/>
+          <p:cNvPr id="28" name="Text 26"/>
           <p:cNvSpPr txBox="1"/>
           <p:nvPr/>
         </p:nvSpPr>
@@ -15933,14 +16016,14 @@
       </p:sp>
       <p:sp>
         <p:nvSpPr>
-          <p:cNvPr id="26" name="Shape 24"/>
+          <p:cNvPr id="29" name="Shape 27"/>
           <p:cNvSpPr/>
           <p:nvPr/>
         </p:nvSpPr>
         <p:spPr>
           <a:xfrm>
             <a:off x="6473952" y="1810512"/>
-            <a:ext cx="5715000" cy="566928"/>
+            <a:ext cx="5715000" cy="502920"/>
           </a:xfrm>
           <a:prstGeom prst="rect">
             <a:avLst/>
@@ -15958,14 +16041,14 @@
       </p:sp>
       <p:sp>
         <p:nvSpPr>
-          <p:cNvPr id="27" name="Text 25"/>
-          <p:cNvSpPr txBox="1"/>
-          <p:nvPr/>
-        </p:nvSpPr>
-        <p:spPr>
-          <a:xfrm>
-            <a:off x="6583680" y="1847088"/>
-            <a:ext cx="5486400" cy="237744"/>
+          <p:cNvPr id="30" name="Text 28"/>
+          <p:cNvSpPr txBox="1"/>
+          <p:nvPr/>
+        </p:nvSpPr>
+        <p:spPr>
+          <a:xfrm>
+            <a:off x="6583680" y="1828800"/>
+            <a:ext cx="5486400" cy="228600"/>
           </a:xfrm>
           <a:prstGeom prst="rect">
             <a:avLst/>
@@ -15981,7 +16064,7 @@
               <a:buNone/>
             </a:pPr>
             <a:r>
-              <a:rPr lang="en-US" sz="1150" b="1" dirty="0">
+              <a:rPr lang="en-US" sz="1100" b="1" dirty="0">
                 <a:solidFill>
                   <a:srgbClr val="16222B"/>
                 </a:solidFill>
@@ -15991,20 +16074,20 @@
               </a:rPr>
               <a:t>ProteinMPNN</a:t>
             </a:r>
-            <a:endParaRPr lang="en-US" sz="1150" dirty="0"/>
-          </a:p>
-        </p:txBody>
-      </p:sp>
-      <p:sp>
-        <p:nvSpPr>
-          <p:cNvPr id="28" name="Text 26"/>
-          <p:cNvSpPr txBox="1"/>
-          <p:nvPr/>
-        </p:nvSpPr>
-        <p:spPr>
-          <a:xfrm>
-            <a:off x="6583680" y="2084832"/>
-            <a:ext cx="5486400" cy="256032"/>
+            <a:endParaRPr lang="en-US" sz="1100" dirty="0"/>
+          </a:p>
+        </p:txBody>
+      </p:sp>
+      <p:sp>
+        <p:nvSpPr>
+          <p:cNvPr id="31" name="Text 29"/>
+          <p:cNvSpPr txBox="1"/>
+          <p:nvPr/>
+        </p:nvSpPr>
+        <p:spPr>
+          <a:xfrm>
+            <a:off x="6583680" y="2048256"/>
+            <a:ext cx="5486400" cy="246888"/>
           </a:xfrm>
           <a:prstGeom prst="rect">
             <a:avLst/>
@@ -16020,7 +16103,7 @@
               <a:buNone/>
             </a:pPr>
             <a:r>
-              <a:rPr lang="en-US" sz="1050" dirty="0">
+              <a:rPr lang="en-US" sz="1000" dirty="0">
                 <a:solidFill>
                   <a:srgbClr val="5E6B75"/>
                 </a:solidFill>
@@ -16030,20 +16113,20 @@
               </a:rPr>
               <a:t>a job spec and a parser. No endpoint → a heuristic proposer, labelled as such</a:t>
             </a:r>
-            <a:endParaRPr lang="en-US" sz="1050" dirty="0"/>
-          </a:p>
-        </p:txBody>
-      </p:sp>
-      <p:sp>
-        <p:nvSpPr>
-          <p:cNvPr id="29" name="Shape 27"/>
+            <a:endParaRPr lang="en-US" sz="1000" dirty="0"/>
+          </a:p>
+        </p:txBody>
+      </p:sp>
+      <p:sp>
+        <p:nvSpPr>
+          <p:cNvPr id="32" name="Shape 30"/>
           <p:cNvSpPr/>
           <p:nvPr/>
         </p:nvSpPr>
         <p:spPr>
           <a:xfrm>
-            <a:off x="6473952" y="2432304"/>
-            <a:ext cx="5715000" cy="566928"/>
+            <a:off x="6473952" y="2359152"/>
+            <a:ext cx="5715000" cy="502920"/>
           </a:xfrm>
           <a:prstGeom prst="rect">
             <a:avLst/>
@@ -16061,14 +16144,14 @@
       </p:sp>
       <p:sp>
         <p:nvSpPr>
-          <p:cNvPr id="30" name="Text 28"/>
-          <p:cNvSpPr txBox="1"/>
-          <p:nvPr/>
-        </p:nvSpPr>
-        <p:spPr>
-          <a:xfrm>
-            <a:off x="6583680" y="2468880"/>
-            <a:ext cx="5486400" cy="237744"/>
+          <p:cNvPr id="33" name="Text 31"/>
+          <p:cNvSpPr txBox="1"/>
+          <p:nvPr/>
+        </p:nvSpPr>
+        <p:spPr>
+          <a:xfrm>
+            <a:off x="6583680" y="2377440"/>
+            <a:ext cx="5486400" cy="228600"/>
           </a:xfrm>
           <a:prstGeom prst="rect">
             <a:avLst/>
@@ -16084,7 +16167,7 @@
               <a:buNone/>
             </a:pPr>
             <a:r>
-              <a:rPr lang="en-US" sz="1150" b="1" dirty="0">
+              <a:rPr lang="en-US" sz="1100" b="1" dirty="0">
                 <a:solidFill>
                   <a:srgbClr val="16222B"/>
                 </a:solidFill>
@@ -16094,20 +16177,20 @@
               </a:rPr>
               <a:t>The Globus adapter</a:t>
             </a:r>
-            <a:endParaRPr lang="en-US" sz="1150" dirty="0"/>
-          </a:p>
-        </p:txBody>
-      </p:sp>
-      <p:sp>
-        <p:nvSpPr>
-          <p:cNvPr id="31" name="Text 29"/>
-          <p:cNvSpPr txBox="1"/>
-          <p:nvPr/>
-        </p:nvSpPr>
-        <p:spPr>
-          <a:xfrm>
-            <a:off x="6583680" y="2706624"/>
-            <a:ext cx="5486400" cy="256032"/>
+            <a:endParaRPr lang="en-US" sz="1100" dirty="0"/>
+          </a:p>
+        </p:txBody>
+      </p:sp>
+      <p:sp>
+        <p:nvSpPr>
+          <p:cNvPr id="34" name="Text 32"/>
+          <p:cNvSpPr txBox="1"/>
+          <p:nvPr/>
+        </p:nvSpPr>
+        <p:spPr>
+          <a:xfrm>
+            <a:off x="6583680" y="2596896"/>
+            <a:ext cx="5486400" cy="246888"/>
           </a:xfrm>
           <a:prstGeom prst="rect">
             <a:avLst/>
@@ -16123,7 +16206,7 @@
               <a:buNone/>
             </a:pPr>
             <a:r>
-              <a:rPr lang="en-US" sz="1050" dirty="0">
+              <a:rPr lang="en-US" sz="1000" dirty="0">
                 <a:solidFill>
                   <a:srgbClr val="5E6B75"/>
                 </a:solidFill>
@@ -16133,20 +16216,20 @@
               </a:rPr>
               <a:t>structurally complete, tested with an injected executor, never met a live endpoint</a:t>
             </a:r>
-            <a:endParaRPr lang="en-US" sz="1050" dirty="0"/>
-          </a:p>
-        </p:txBody>
-      </p:sp>
-      <p:sp>
-        <p:nvSpPr>
-          <p:cNvPr id="32" name="Shape 30"/>
+            <a:endParaRPr lang="en-US" sz="1000" dirty="0"/>
+          </a:p>
+        </p:txBody>
+      </p:sp>
+      <p:sp>
+        <p:nvSpPr>
+          <p:cNvPr id="35" name="Shape 33"/>
           <p:cNvSpPr/>
           <p:nvPr/>
         </p:nvSpPr>
         <p:spPr>
           <a:xfrm>
-            <a:off x="6473952" y="3054096"/>
-            <a:ext cx="5715000" cy="566928"/>
+            <a:off x="6473952" y="2907792"/>
+            <a:ext cx="5715000" cy="502920"/>
           </a:xfrm>
           <a:prstGeom prst="rect">
             <a:avLst/>
@@ -16164,14 +16247,14 @@
       </p:sp>
       <p:sp>
         <p:nvSpPr>
-          <p:cNvPr id="33" name="Text 31"/>
-          <p:cNvSpPr txBox="1"/>
-          <p:nvPr/>
-        </p:nvSpPr>
-        <p:spPr>
-          <a:xfrm>
-            <a:off x="6583680" y="3090672"/>
-            <a:ext cx="5486400" cy="237744"/>
+          <p:cNvPr id="36" name="Text 34"/>
+          <p:cNvSpPr txBox="1"/>
+          <p:nvPr/>
+        </p:nvSpPr>
+        <p:spPr>
+          <a:xfrm>
+            <a:off x="6583680" y="2926080"/>
+            <a:ext cx="5486400" cy="228600"/>
           </a:xfrm>
           <a:prstGeom prst="rect">
             <a:avLst/>
@@ -16187,7 +16270,7 @@
               <a:buNone/>
             </a:pPr>
             <a:r>
-              <a:rPr lang="en-US" sz="1150" b="1" dirty="0">
+              <a:rPr lang="en-US" sz="1100" b="1" dirty="0">
                 <a:solidFill>
                   <a:srgbClr val="16222B"/>
                 </a:solidFill>
@@ -16197,20 +16280,20 @@
               </a:rPr>
               <a:t>Orbit</a:t>
             </a:r>
-            <a:endParaRPr lang="en-US" sz="1150" dirty="0"/>
-          </a:p>
-        </p:txBody>
-      </p:sp>
-      <p:sp>
-        <p:nvSpPr>
-          <p:cNvPr id="34" name="Text 32"/>
-          <p:cNvSpPr txBox="1"/>
-          <p:nvPr/>
-        </p:nvSpPr>
-        <p:spPr>
-          <a:xfrm>
-            <a:off x="6583680" y="3328416"/>
-            <a:ext cx="5486400" cy="256032"/>
+            <a:endParaRPr lang="en-US" sz="1100" dirty="0"/>
+          </a:p>
+        </p:txBody>
+      </p:sp>
+      <p:sp>
+        <p:nvSpPr>
+          <p:cNvPr id="37" name="Text 35"/>
+          <p:cNvSpPr txBox="1"/>
+          <p:nvPr/>
+        </p:nvSpPr>
+        <p:spPr>
+          <a:xfrm>
+            <a:off x="6583680" y="3145536"/>
+            <a:ext cx="5486400" cy="246888"/>
           </a:xfrm>
           <a:prstGeom prst="rect">
             <a:avLst/>
@@ -16226,7 +16309,7 @@
               <a:buNone/>
             </a:pPr>
             <a:r>
-              <a:rPr lang="en-US" sz="1050" dirty="0">
+              <a:rPr lang="en-US" sz="1000" dirty="0">
                 <a:solidFill>
                   <a:srgbClr val="5E6B75"/>
                 </a:solidFill>
@@ -16236,20 +16319,20 @@
               </a:rPr>
               <a:t>works — against a localhost broker only. Never seen a scheduler or a queue</a:t>
             </a:r>
-            <a:endParaRPr lang="en-US" sz="1050" dirty="0"/>
-          </a:p>
-        </p:txBody>
-      </p:sp>
-      <p:sp>
-        <p:nvSpPr>
-          <p:cNvPr id="35" name="Shape 33"/>
+            <a:endParaRPr lang="en-US" sz="1000" dirty="0"/>
+          </a:p>
+        </p:txBody>
+      </p:sp>
+      <p:sp>
+        <p:nvSpPr>
+          <p:cNvPr id="38" name="Shape 36"/>
           <p:cNvSpPr/>
           <p:nvPr/>
         </p:nvSpPr>
         <p:spPr>
           <a:xfrm>
-            <a:off x="6473952" y="3675888"/>
-            <a:ext cx="5715000" cy="566928"/>
+            <a:off x="6473952" y="3456432"/>
+            <a:ext cx="5715000" cy="502920"/>
           </a:xfrm>
           <a:prstGeom prst="rect">
             <a:avLst/>
@@ -16267,14 +16350,14 @@
       </p:sp>
       <p:sp>
         <p:nvSpPr>
-          <p:cNvPr id="36" name="Text 34"/>
-          <p:cNvSpPr txBox="1"/>
-          <p:nvPr/>
-        </p:nvSpPr>
-        <p:spPr>
-          <a:xfrm>
-            <a:off x="6583680" y="3712464"/>
-            <a:ext cx="5486400" cy="237744"/>
+          <p:cNvPr id="39" name="Text 37"/>
+          <p:cNvSpPr txBox="1"/>
+          <p:nvPr/>
+        </p:nvSpPr>
+        <p:spPr>
+          <a:xfrm>
+            <a:off x="6583680" y="3474720"/>
+            <a:ext cx="5486400" cy="228600"/>
           </a:xfrm>
           <a:prstGeom prst="rect">
             <a:avLst/>
@@ -16290,7 +16373,7 @@
               <a:buNone/>
             </a:pPr>
             <a:r>
-              <a:rPr lang="en-US" sz="1150" b="1" dirty="0">
+              <a:rPr lang="en-US" sz="1100" b="1" dirty="0">
                 <a:solidFill>
                   <a:srgbClr val="16222B"/>
                 </a:solidFill>
@@ -16300,20 +16383,20 @@
               </a:rPr>
               <a:t>ChemGraph</a:t>
             </a:r>
-            <a:endParaRPr lang="en-US" sz="1150" dirty="0"/>
-          </a:p>
-        </p:txBody>
-      </p:sp>
-      <p:sp>
-        <p:nvSpPr>
-          <p:cNvPr id="37" name="Text 35"/>
-          <p:cNvSpPr txBox="1"/>
-          <p:nvPr/>
-        </p:nvSpPr>
-        <p:spPr>
-          <a:xfrm>
-            <a:off x="6583680" y="3950208"/>
-            <a:ext cx="5486400" cy="256032"/>
+            <a:endParaRPr lang="en-US" sz="1100" dirty="0"/>
+          </a:p>
+        </p:txBody>
+      </p:sp>
+      <p:sp>
+        <p:nvSpPr>
+          <p:cNvPr id="40" name="Text 38"/>
+          <p:cNvSpPr txBox="1"/>
+          <p:nvPr/>
+        </p:nvSpPr>
+        <p:spPr>
+          <a:xfrm>
+            <a:off x="6583680" y="3694176"/>
+            <a:ext cx="5486400" cy="246888"/>
           </a:xfrm>
           <a:prstGeom prst="rect">
             <a:avLst/>
@@ -16329,7 +16412,7 @@
               <a:buNone/>
             </a:pPr>
             <a:r>
-              <a:rPr lang="en-US" sz="1050" dirty="0">
+              <a:rPr lang="en-US" sz="1000" dirty="0">
                 <a:solidFill>
                   <a:srgbClr val="5E6B75"/>
                 </a:solidFill>
@@ -16339,20 +16422,20 @@
               </a:rPr>
               <a:t>wired behind the interface; exercised by tests, never by a campaign</a:t>
             </a:r>
-            <a:endParaRPr lang="en-US" sz="1050" dirty="0"/>
-          </a:p>
-        </p:txBody>
-      </p:sp>
-      <p:sp>
-        <p:nvSpPr>
-          <p:cNvPr id="38" name="Shape 36"/>
+            <a:endParaRPr lang="en-US" sz="1000" dirty="0"/>
+          </a:p>
+        </p:txBody>
+      </p:sp>
+      <p:sp>
+        <p:nvSpPr>
+          <p:cNvPr id="41" name="Shape 39"/>
           <p:cNvSpPr/>
           <p:nvPr/>
         </p:nvSpPr>
         <p:spPr>
           <a:xfrm>
-            <a:off x="6473952" y="4297680"/>
-            <a:ext cx="5715000" cy="566928"/>
+            <a:off x="6473952" y="4005072"/>
+            <a:ext cx="5715000" cy="502920"/>
           </a:xfrm>
           <a:prstGeom prst="rect">
             <a:avLst/>
@@ -16370,14 +16453,14 @@
       </p:sp>
       <p:sp>
         <p:nvSpPr>
-          <p:cNvPr id="39" name="Text 37"/>
-          <p:cNvSpPr txBox="1"/>
-          <p:nvPr/>
-        </p:nvSpPr>
-        <p:spPr>
-          <a:xfrm>
-            <a:off x="6583680" y="4334256"/>
-            <a:ext cx="5486400" cy="237744"/>
+          <p:cNvPr id="42" name="Text 40"/>
+          <p:cNvSpPr txBox="1"/>
+          <p:nvPr/>
+        </p:nvSpPr>
+        <p:spPr>
+          <a:xfrm>
+            <a:off x="6583680" y="4023360"/>
+            <a:ext cx="5486400" cy="228600"/>
           </a:xfrm>
           <a:prstGeom prst="rect">
             <a:avLst/>
@@ -16393,7 +16476,7 @@
               <a:buNone/>
             </a:pPr>
             <a:r>
-              <a:rPr lang="en-US" sz="1150" b="1" dirty="0">
+              <a:rPr lang="en-US" sz="1100" b="1" dirty="0">
                 <a:solidFill>
                   <a:srgbClr val="16222B"/>
                 </a:solidFill>
@@ -16401,22 +16484,22 @@
                 <a:ea typeface="Calibri" pitchFamily="34" charset="-122"/>
                 <a:cs typeface="Calibri" pitchFamily="34" charset="-120"/>
               </a:rPr>
-              <a:t>The Mol* canvas</a:t>
-            </a:r>
-            <a:endParaRPr lang="en-US" sz="1150" dirty="0"/>
-          </a:p>
-        </p:txBody>
-      </p:sp>
-      <p:sp>
-        <p:nvSpPr>
-          <p:cNvPr id="40" name="Text 38"/>
-          <p:cNvSpPr txBox="1"/>
-          <p:nvPr/>
-        </p:nvSpPr>
-        <p:spPr>
-          <a:xfrm>
-            <a:off x="6583680" y="4572000"/>
-            <a:ext cx="5486400" cy="256032"/>
+              <a:t>wrap_nodes</a:t>
+            </a:r>
+            <a:endParaRPr lang="en-US" sz="1100" dirty="0"/>
+          </a:p>
+        </p:txBody>
+      </p:sp>
+      <p:sp>
+        <p:nvSpPr>
+          <p:cNvPr id="43" name="Text 41"/>
+          <p:cNvSpPr txBox="1"/>
+          <p:nvPr/>
+        </p:nvSpPr>
+        <p:spPr>
+          <a:xfrm>
+            <a:off x="6583680" y="4242816"/>
+            <a:ext cx="5486400" cy="246888"/>
           </a:xfrm>
           <a:prstGeom prst="rect">
             <a:avLst/>
@@ -16432,7 +16515,7 @@
               <a:buNone/>
             </a:pPr>
             <a:r>
-              <a:rPr lang="en-US" sz="1050" dirty="0">
+              <a:rPr lang="en-US" sz="1000" dirty="0">
                 <a:solidFill>
                   <a:srgbClr val="5E6B75"/>
                 </a:solidFill>
@@ -16440,112 +16523,9 @@
                 <a:ea typeface="Calibri" pitchFamily="34" charset="-122"/>
                 <a:cs typeface="Calibri" pitchFamily="34" charset="-120"/>
               </a:rPr>
-              <a:t>unverified by eye; no browser was available</a:t>
-            </a:r>
-            <a:endParaRPr lang="en-US" sz="1050" dirty="0"/>
-          </a:p>
-        </p:txBody>
-      </p:sp>
-      <p:sp>
-        <p:nvSpPr>
-          <p:cNvPr id="41" name="Shape 39"/>
-          <p:cNvSpPr/>
-          <p:nvPr/>
-        </p:nvSpPr>
-        <p:spPr>
-          <a:xfrm>
-            <a:off x="6473952" y="4919472"/>
-            <a:ext cx="5715000" cy="566928"/>
-          </a:xfrm>
-          <a:prstGeom prst="rect">
-            <a:avLst/>
-          </a:prstGeom>
-          <a:solidFill>
-            <a:srgbClr val="FFFFFF"/>
-          </a:solidFill>
-          <a:ln w="6350">
-            <a:solidFill>
-              <a:srgbClr val="C9D1D8"/>
-            </a:solidFill>
-            <a:prstDash val="solid"/>
-          </a:ln>
-        </p:spPr>
-      </p:sp>
-      <p:sp>
-        <p:nvSpPr>
-          <p:cNvPr id="42" name="Text 40"/>
-          <p:cNvSpPr txBox="1"/>
-          <p:nvPr/>
-        </p:nvSpPr>
-        <p:spPr>
-          <a:xfrm>
-            <a:off x="6583680" y="4956048"/>
-            <a:ext cx="5486400" cy="237744"/>
-          </a:xfrm>
-          <a:prstGeom prst="rect">
-            <a:avLst/>
-          </a:prstGeom>
-          <a:noFill/>
-          <a:ln/>
-        </p:spPr>
-        <p:txBody>
-          <a:bodyPr wrap="square" lIns="0" tIns="0" rIns="0" bIns="0" rtlCol="0" anchor="t"/>
-          <a:lstStyle/>
-          <a:p>
-            <a:pPr indent="0" marL="0">
-              <a:buNone/>
-            </a:pPr>
-            <a:r>
-              <a:rPr lang="en-US" sz="1150" b="1" dirty="0">
-                <a:solidFill>
-                  <a:srgbClr val="16222B"/>
-                </a:solidFill>
-                <a:latin typeface="Calibri" pitchFamily="34" charset="0"/>
-                <a:ea typeface="Calibri" pitchFamily="34" charset="-122"/>
-                <a:cs typeface="Calibri" pitchFamily="34" charset="-120"/>
-              </a:rPr>
-              <a:t>wrap_nodes</a:t>
-            </a:r>
-            <a:endParaRPr lang="en-US" sz="1150" dirty="0"/>
-          </a:p>
-        </p:txBody>
-      </p:sp>
-      <p:sp>
-        <p:nvSpPr>
-          <p:cNvPr id="43" name="Text 41"/>
-          <p:cNvSpPr txBox="1"/>
-          <p:nvPr/>
-        </p:nvSpPr>
-        <p:spPr>
-          <a:xfrm>
-            <a:off x="6583680" y="5193792"/>
-            <a:ext cx="5486400" cy="256032"/>
-          </a:xfrm>
-          <a:prstGeom prst="rect">
-            <a:avLst/>
-          </a:prstGeom>
-          <a:noFill/>
-          <a:ln/>
-        </p:spPr>
-        <p:txBody>
-          <a:bodyPr wrap="square" lIns="0" tIns="0" rIns="0" bIns="0" rtlCol="0" anchor="t"/>
-          <a:lstStyle/>
-          <a:p>
-            <a:pPr indent="0" marL="0">
-              <a:buNone/>
-            </a:pPr>
-            <a:r>
-              <a:rPr lang="en-US" sz="1050" dirty="0">
-                <a:solidFill>
-                  <a:srgbClr val="5E6B75"/>
-                </a:solidFill>
-                <a:latin typeface="Calibri" pitchFamily="34" charset="0"/>
-                <a:ea typeface="Calibri" pitchFamily="34" charset="-122"/>
-                <a:cs typeface="Calibri" pitchFamily="34" charset="-120"/>
-              </a:rPr>
               <a:t>ships off, against the approved design. Next slide</a:t>
             </a:r>
-            <a:endParaRPr lang="en-US" sz="1050" dirty="0"/>
+            <a:endParaRPr lang="en-US" sz="1000" dirty="0"/>
           </a:p>
         </p:txBody>
       </p:sp>

--- a/slides/designagent-codewalk.pptx
+++ b/slides/designagent-codewalk.pptx
@@ -1162,7 +1162,7 @@
             <a:r>
               <a:rPr lang="en-US" dirty="0"/>
               <a:t>[1:00] Three commands to run it, two to test it, and no configuration step that has to succeed first.
-The test split is the part I would defend. 83 of the 89 tests need no network, no process pool and no endpoint. That is a direct consequence of the rule from the architecture slide — nodes only reach the outside through Deps — so the suite hands them an in-process task manager and a temp-directory lake and the whole graph runs in under a second.
+The test split is the part I would defend. 93 of the 99 tests need no network, no process pool and no endpoint. That is a direct consequence of the rule from the architecture slide — nodes only reach the outside through Deps — so the suite hands them an in-process task manager and a temp-directory lake and the whole graph runs in under a second.
 The six that genuinely need a substrate are marked live and bring up their own broker and endpoint as subprocesses. They are not mocks of ORBIT; they are ORBIT, on localhost.
 What I would call out in the middle column is that test_graph covers the classifier with eighteen parametrized cases. That is there because two real bugs hid in it: "what is the lead design?" classified as a design request because it contains the word design, and "make it more stable" classified as chat because it matched nothing at all. Both are the kind of bug an LLM path would have masked and the rule path makes visible.</a:t>
             </a:r>
@@ -1897,7 +1897,7 @@
               <a:t>[1:15] Eight bands. Read it top to bottom and the orange is yours.
 Browser, then FastAPI with a single SSE chat endpoint. Then the LangGraph graph, checkpointed to SQLite. Then a small Deps object, which is the only thing a node closes over — settings, the task manager, the history lake, the artifact store.
 Then the three task interfaces. Then the substrate, which is flowgentic over asyncflow over a rhapsody concurrent backend on a four-worker process pool. Then remote: ORBIT solid-but-dotted, meaning it genuinely works and has only ever met a localhost broker; Globus dashed, meaning designed for and not implemented against anything live. Then the three lake tiers.
-Two things in the rail. The rule that nodes only ever reach through Deps is what makes 83 of the 89 tests run with no network and no pool. And the band that crosses into asyncflow is exactly one: the local task interface. Everything above it is ordinary async Python, which is deliberate — I wanted the middleware dependency confined to a layer I could swap or stub.</a:t>
+Two things in the rail. The rule that nodes only ever reach through Deps is what makes 93 of the 99 tests run with no network and no pool. And the band that crosses into asyncflow is exactly one: the local task interface. Everything above it is ordinary async Python, which is deliberate — I wanted the middleware dependency confined to a layer I could swap or stub.</a:t>
             </a:r>
             <a:endParaRPr lang="en-US" dirty="0"/>
           </a:p>
@@ -13514,7 +13514,7 @@
                 <a:ea typeface="Consolas" pitchFamily="34" charset="-122"/>
                 <a:cs typeface="Consolas" pitchFamily="34" charset="-120"/>
               </a:rPr>
-              <a:t>$ pytest -q                                 # 83 tests, no network</a:t>
+              <a:t>$ pytest -q                                 # 93 tests, no network</a:t>
             </a:r>
             <a:endParaRPr lang="en-US" sz="930" dirty="0"/>
           </a:p>
@@ -15021,7 +15021,7 @@
                 <a:ea typeface="Calibri" pitchFamily="34" charset="-122"/>
                 <a:cs typeface="Calibri" pitchFamily="34" charset="-120"/>
               </a:rPr>
-              <a:t>83 tests need no network, no pool and no endpoint, because nodes only reach through Deps. The 6 that do are marked </a:t>
+              <a:t>93 tests need no network, no pool and no endpoint, because nodes only reach through Deps. The 6 that do are marked </a:t>
             </a:r>
             <a:pPr indent="0" marL="0">
               <a:buNone/>
@@ -25900,7 +25900,7 @@
                 <a:ea typeface="Calibri" pitchFamily="34" charset="-122"/>
                 <a:cs typeface="Calibri" pitchFamily="34" charset="-120"/>
               </a:rPr>
-              <a:t>That is what makes 83 of 89 tests run with no network, no pool and no endpoint.</a:t>
+              <a:t>That is what makes 93 of 99 tests run with no network, no pool and no endpoint.</a:t>
             </a:r>
             <a:endParaRPr lang="en-US" sz="1050" dirty="0"/>
           </a:p>
@@ -26793,7 +26793,7 @@
                 <a:ea typeface="Consolas" pitchFamily="34" charset="-122"/>
                 <a:cs typeface="Consolas" pitchFamily="34" charset="-120"/>
               </a:rPr>
-              <a:t>graph/state.py:160–188  ·  TRIMMED</a:t>
+              <a:t>graph/state.py:168–196  ·  TRIMMED</a:t>
             </a:r>
             <a:endParaRPr lang="en-US" sz="850" dirty="0"/>
           </a:p>

--- a/slides/designagent-codewalk.pptx
+++ b/slides/designagent-codewalk.pptx
@@ -11588,7 +11588,7 @@
                 <a:ea typeface="Consolas" pitchFamily="34" charset="-122"/>
                 <a:cs typeface="Consolas" pitchFamily="34" charset="-120"/>
               </a:rPr>
-              <a:t>graph/nodes/analyst.py:155–219  ·  TRIMMED</a:t>
+              <a:t>graph/nodes/analyst.py:155–222  ·  TRIMMED</a:t>
             </a:r>
             <a:endParaRPr lang="en-US" sz="850" dirty="0"/>
           </a:p>
@@ -21920,7 +21920,7 @@
                           <a:ea typeface="Consolas" pitchFamily="34" charset="-122"/>
                           <a:cs typeface="Consolas" pitchFamily="34" charset="-120"/>
                         </a:rPr>
-                        <a:t>graph/deps.py · app.py:78</a:t>
+                        <a:t>graph/deps.py · app.py:77</a:t>
                       </a:r>
                       <a:endParaRPr lang="en-US" sz="1000" dirty="0">
                         <a:latin typeface="Consolas" charset="0"/>
@@ -22126,7 +22126,7 @@
                           <a:ea typeface="Consolas" pitchFamily="34" charset="-122"/>
                           <a:cs typeface="Consolas" pitchFamily="34" charset="-120"/>
                         </a:rPr>
-                        <a:t>orchestrator.py:249</a:t>
+                        <a:t>orchestrator.py:252</a:t>
                       </a:r>
                       <a:endParaRPr lang="en-US" sz="1000" dirty="0">
                         <a:latin typeface="Consolas" charset="0"/>
@@ -22332,7 +22332,7 @@
                           <a:ea typeface="Consolas" pitchFamily="34" charset="-122"/>
                           <a:cs typeface="Consolas" pitchFamily="34" charset="-120"/>
                         </a:rPr>
-                        <a:t>runtime.py · analyst.py:154</a:t>
+                        <a:t>runtime.py · analyst.py:155</a:t>
                       </a:r>
                       <a:endParaRPr lang="en-US" sz="1000" dirty="0">
                         <a:latin typeface="Consolas" charset="0"/>
@@ -27199,7 +27199,7 @@
                 <a:ea typeface="Consolas" pitchFamily="34" charset="-122"/>
                 <a:cs typeface="Consolas" pitchFamily="34" charset="-120"/>
               </a:rPr>
-              <a:t>orchestrator.py:249–253  ·  TRIMMED</a:t>
+              <a:t>orchestrator.py:252–256  ·  TRIMMED</a:t>
             </a:r>
             <a:endParaRPr lang="en-US" sz="850" dirty="0"/>
           </a:p>
@@ -36185,7 +36185,7 @@
                 <a:ea typeface="Consolas" pitchFamily="34" charset="-122"/>
                 <a:cs typeface="Consolas" pitchFamily="34" charset="-120"/>
               </a:rPr>
-              <a:t>tasks/local.py:60–65  ·  VERBATIM</a:t>
+              <a:t>tasks/local.py:58–63  ·  VERBATIM</a:t>
             </a:r>
             <a:endParaRPr lang="en-US" sz="850" dirty="0"/>
           </a:p>

--- a/slides/designagent-codewalk.pptx
+++ b/slides/designagent-codewalk.pptx
@@ -4221,7 +4221,7 @@
                 <a:ea typeface="Consolas" pitchFamily="34" charset="-122"/>
                 <a:cs typeface="Consolas" pitchFamily="34" charset="-120"/>
               </a:rPr>
-              <a:t>tasks/hpc/orbit.py:261–265  ·  VERBATIM</a:t>
+              <a:t>tasks/hpc/orbit.py:286–290  ·  VERBATIM</a:t>
             </a:r>
             <a:endParaRPr lang="en-US" sz="850" dirty="0"/>
           </a:p>
@@ -4551,7 +4551,7 @@
                 <a:ea typeface="Consolas" pitchFamily="34" charset="-122"/>
                 <a:cs typeface="Consolas" pitchFamily="34" charset="-120"/>
               </a:rPr>
-              <a:t>tasks/hpc/orbit.py:286–299  ·  TRIMMED</a:t>
+              <a:t>tasks/hpc/orbit.py:311–324  ·  TRIMMED</a:t>
             </a:r>
             <a:endParaRPr lang="en-US" sz="850" dirty="0"/>
           </a:p>
@@ -4717,7 +4717,7 @@
                 <a:ea typeface="Consolas" pitchFamily="34" charset="-122"/>
                 <a:cs typeface="Consolas" pitchFamily="34" charset="-120"/>
               </a:rPr>
-              <a:t>tasks/hpc/orbit.py:353–357  ·  TRIMMED</a:t>
+              <a:t>tasks/hpc/orbit.py:378–382  ·  TRIMMED</a:t>
             </a:r>
             <a:endParaRPr lang="en-US" sz="850" dirty="0"/>
           </a:p>
@@ -11232,7 +11232,7 @@
                           <a:ea typeface="Consolas" pitchFamily="34" charset="-122"/>
                           <a:cs typeface="Consolas" pitchFamily="34" charset="-120"/>
                         </a:rPr>
-                        <a:t>runtime.py:172</a:t>
+                        <a:t>runtime.py:373</a:t>
                       </a:r>
                       <a:endParaRPr lang="en-US" sz="950" dirty="0">
                         <a:latin typeface="Consolas" charset="0"/>
@@ -12900,7 +12900,7 @@
                 <a:ea typeface="Consolas" pitchFamily="34" charset="-122"/>
                 <a:cs typeface="Consolas" pitchFamily="34" charset="-120"/>
               </a:rPr>
-              <a:t>frontend/src/lib/api.ts:30–49  ·  TRIMMED</a:t>
+              <a:t>frontend/src/lib/api.ts:38–57  ·  TRIMMED</a:t>
             </a:r>
             <a:endParaRPr lang="en-US" sz="850" dirty="0"/>
           </a:p>
@@ -21920,7 +21920,7 @@
                           <a:ea typeface="Consolas" pitchFamily="34" charset="-122"/>
                           <a:cs typeface="Consolas" pitchFamily="34" charset="-120"/>
                         </a:rPr>
-                        <a:t>graph/deps.py · app.py:77</a:t>
+                        <a:t>graph/deps.py · app.py:118</a:t>
                       </a:r>
                       <a:endParaRPr lang="en-US" sz="1000" dirty="0">
                         <a:latin typeface="Consolas" charset="0"/>
@@ -22126,7 +22126,7 @@
                           <a:ea typeface="Consolas" pitchFamily="34" charset="-122"/>
                           <a:cs typeface="Consolas" pitchFamily="34" charset="-120"/>
                         </a:rPr>
-                        <a:t>orchestrator.py:252</a:t>
+                        <a:t>orchestrator.py:271</a:t>
                       </a:r>
                       <a:endParaRPr lang="en-US" sz="1000" dirty="0">
                         <a:latin typeface="Consolas" charset="0"/>
@@ -27199,7 +27199,7 @@
                 <a:ea typeface="Consolas" pitchFamily="34" charset="-122"/>
                 <a:cs typeface="Consolas" pitchFamily="34" charset="-120"/>
               </a:rPr>
-              <a:t>orchestrator.py:252–256  ·  TRIMMED</a:t>
+              <a:t>orchestrator.py:271–275  ·  TRIMMED</a:t>
             </a:r>
             <a:endParaRPr lang="en-US" sz="850" dirty="0"/>
           </a:p>
@@ -34859,7 +34859,7 @@
                 <a:ea typeface="Consolas" pitchFamily="34" charset="-122"/>
                 <a:cs typeface="Consolas" pitchFamily="34" charset="-120"/>
               </a:rPr>
-              <a:t>tasks/manager.py:99–115  ·  TRIMMED</a:t>
+              <a:t>tasks/manager.py:111–127  ·  TRIMMED</a:t>
             </a:r>
             <a:endParaRPr lang="en-US" sz="850" dirty="0"/>
           </a:p>
@@ -35959,7 +35959,7 @@
                 <a:ea typeface="Consolas" pitchFamily="34" charset="-122"/>
                 <a:cs typeface="Consolas" pitchFamily="34" charset="-120"/>
               </a:rPr>
-              <a:t>runtime.py:76–89  ·  TRIMMED</a:t>
+              <a:t>runtime.py:204–217  ·  TRIMMED</a:t>
             </a:r>
             <a:endParaRPr lang="en-US" sz="850" dirty="0"/>
           </a:p>

--- a/slides/designagent-codewalk.pptx
+++ b/slides/designagent-codewalk.pptx
@@ -18378,7 +18378,7 @@
                 <a:ea typeface="Consolas" pitchFamily="34" charset="-122"/>
                 <a:cs typeface="Consolas" pitchFamily="34" charset="-120"/>
               </a:rPr>
-              <a:t>graph/build.py:38–87  ·  TRIMMED</a:t>
+              <a:t>graph/build.py:41–133  ·  TRIMMED</a:t>
             </a:r>
             <a:endParaRPr lang="en-US" sz="850" dirty="0"/>
           </a:p>
@@ -21508,7 +21508,7 @@
                           <a:ea typeface="Consolas" pitchFamily="34" charset="-122"/>
                           <a:cs typeface="Consolas" pitchFamily="34" charset="-120"/>
                         </a:rPr>
-                        <a:t>tasks/base.py:146</a:t>
+                        <a:t>tasks/base.py:159</a:t>
                       </a:r>
                       <a:endParaRPr lang="en-US" sz="1000" dirty="0">
                         <a:latin typeface="Consolas" charset="0"/>
@@ -21920,7 +21920,7 @@
                           <a:ea typeface="Consolas" pitchFamily="34" charset="-122"/>
                           <a:cs typeface="Consolas" pitchFamily="34" charset="-120"/>
                         </a:rPr>
-                        <a:t>graph/deps.py · app.py:118</a:t>
+                        <a:t>graph/deps.py · app.py:124</a:t>
                       </a:r>
                       <a:endParaRPr lang="en-US" sz="1000" dirty="0">
                         <a:latin typeface="Consolas" charset="0"/>
@@ -22126,7 +22126,7 @@
                           <a:ea typeface="Consolas" pitchFamily="34" charset="-122"/>
                           <a:cs typeface="Consolas" pitchFamily="34" charset="-120"/>
                         </a:rPr>
-                        <a:t>orchestrator.py:271</a:t>
+                        <a:t>orchestrator.py:272</a:t>
                       </a:r>
                       <a:endParaRPr lang="en-US" sz="1000" dirty="0">
                         <a:latin typeface="Consolas" charset="0"/>
@@ -23808,7 +23808,7 @@
                 <a:ea typeface="Consolas" pitchFamily="34" charset="-122"/>
                 <a:cs typeface="Consolas" pitchFamily="34" charset="-120"/>
               </a:rPr>
-              <a:t>graph/build.py:99–114  ·  VERBATIM</a:t>
+              <a:t>graph/build.py:145–162  ·  VERBATIM</a:t>
             </a:r>
             <a:endParaRPr lang="en-US" sz="850" dirty="0"/>
           </a:p>
@@ -26793,7 +26793,7 @@
                 <a:ea typeface="Consolas" pitchFamily="34" charset="-122"/>
                 <a:cs typeface="Consolas" pitchFamily="34" charset="-120"/>
               </a:rPr>
-              <a:t>graph/state.py:168–196  ·  TRIMMED</a:t>
+              <a:t>graph/state.py:169–198  ·  TRIMMED</a:t>
             </a:r>
             <a:endParaRPr lang="en-US" sz="850" dirty="0"/>
           </a:p>
@@ -27199,7 +27199,7 @@
                 <a:ea typeface="Consolas" pitchFamily="34" charset="-122"/>
                 <a:cs typeface="Consolas" pitchFamily="34" charset="-120"/>
               </a:rPr>
-              <a:t>orchestrator.py:271–275  ·  TRIMMED</a:t>
+              <a:t>orchestrator.py:272–276  ·  TRIMMED</a:t>
             </a:r>
             <a:endParaRPr lang="en-US" sz="850" dirty="0"/>
           </a:p>
@@ -32264,7 +32264,7 @@
                 <a:ea typeface="Consolas" pitchFamily="34" charset="-122"/>
                 <a:cs typeface="Consolas" pitchFamily="34" charset="-120"/>
               </a:rPr>
-              <a:t>tasks/base.py:135–173  ·  TRIMMED</a:t>
+              <a:t>tasks/base.py:148–186  ·  TRIMMED</a:t>
             </a:r>
             <a:endParaRPr lang="en-US" sz="850" dirty="0"/>
           </a:p>

--- a/slides/designagent-codewalk.pptx
+++ b/slides/designagent-codewalk.pptx
@@ -3907,7 +3907,7 @@
                 <a:ea typeface="Calibri" pitchFamily="34" charset="-122"/>
                 <a:cs typeface="Calibri" pitchFamily="34" charset="-120"/>
               </a:rPr>
-              <a:t>DESIGNAGENT</a:t>
+              <a:t>PEAT</a:t>
             </a:r>
             <a:endParaRPr lang="en-US" sz="1400" dirty="0"/>
           </a:p>
@@ -25137,7 +25137,7 @@
                 <a:ea typeface="Calibri" pitchFamily="34" charset="-122"/>
                 <a:cs typeface="Calibri" pitchFamily="34" charset="-120"/>
               </a:rPr>
-              <a:t>designagent :8000</a:t>
+              <a:t>PEAT :8000</a:t>
             </a:r>
             <a:endParaRPr lang="en-US" sz="1400" dirty="0"/>
           </a:p>
